--- a/2026ВКР238330МОРДАСОВ_презентация.pptx
+++ b/2026ВКР238330МОРДАСОВ_презентация.pptx
@@ -7116,7 +7116,7 @@
                   <a:srgbClr val="000000"/>
                 </a:solidFill>
               </a:rPr>
-              <a:t>Тестирование проведено на независимой выборке из 38 052 пациентов.</a:t>
+              <a:t>Тестирование проведено на независимой выборке из 38052 пациентов.</a:t>
             </a:r>
           </a:p>
         </p:txBody>
@@ -8516,7 +8516,7 @@
                   <a:srgbClr val="000000"/>
                 </a:solidFill>
               </a:rPr>
-              <a:t>Проанализировать существующие подходы и аналоги</a:t>
+              <a:t>Обзор существующих подходов и аналогов</a:t>
             </a:r>
           </a:p>
           <a:p>
@@ -10176,10 +10176,10 @@
               <a:buNone/>
             </a:pPr>
             <a:r>
-              <a:rPr lang="en"/>
-              <a:t>Задача 3</a:t>
+              <a:rPr lang="ru-RU" dirty="0"/>
+              <a:t>Обучение</a:t>
             </a:r>
-            <a:endParaRPr/>
+            <a:endParaRPr dirty="0"/>
           </a:p>
         </p:txBody>
       </p:sp>

--- a/2026ВКР238330МОРДАСОВ_презентация.pptx
+++ b/2026ВКР238330МОРДАСОВ_презентация.pptx
@@ -6873,13 +6873,29 @@
               </a:rPr>
               <a:t>Руководитель:							</a:t>
             </a:r>
+            <a:endParaRPr lang="ru-RU" sz="1800" dirty="0">
+              <a:solidFill>
+                <a:srgbClr val="000000"/>
+              </a:solidFill>
+            </a:endParaRPr>
+          </a:p>
+          <a:p>
+            <a:pPr marL="0" lvl="0" indent="0" algn="l" rtl="0">
+              <a:spcBef>
+                <a:spcPts val="0"/>
+              </a:spcBef>
+              <a:spcAft>
+                <a:spcPts val="0"/>
+              </a:spcAft>
+              <a:buNone/>
+            </a:pPr>
             <a:r>
               <a:rPr lang="ru-RU" sz="1800" dirty="0">
                 <a:solidFill>
                   <a:srgbClr val="000000"/>
                 </a:solidFill>
               </a:rPr>
-              <a:t>Борисенко Константин Алексеевич</a:t>
+              <a:t>	Борисенко Константин Алексеевич</a:t>
             </a:r>
             <a:r>
               <a:rPr lang="en" sz="1800" dirty="0">
@@ -7668,7 +7684,7 @@
         </p:nvSpPr>
         <p:spPr>
           <a:xfrm>
-            <a:off x="311700" y="593367"/>
+            <a:off x="311700" y="228932"/>
             <a:ext cx="8520600" cy="763500"/>
           </a:xfrm>
           <a:prstGeom prst="rect">
@@ -7691,10 +7707,10 @@
               <a:buNone/>
             </a:pPr>
             <a:r>
-              <a:rPr lang="en"/>
+              <a:rPr lang="en" dirty="0"/>
               <a:t>Заключение</a:t>
             </a:r>
-            <a:endParaRPr/>
+            <a:endParaRPr dirty="0"/>
           </a:p>
         </p:txBody>
       </p:sp>
@@ -7710,7 +7726,7 @@
         </p:nvSpPr>
         <p:spPr>
           <a:xfrm>
-            <a:off x="311700" y="1536633"/>
+            <a:off x="226208" y="846658"/>
             <a:ext cx="8520600" cy="4555200"/>
           </a:xfrm>
           <a:prstGeom prst="rect">
@@ -7737,12 +7753,28 @@
               <a:buChar char="●"/>
             </a:pPr>
             <a:r>
-              <a:rPr lang="ru-RU" sz="2400" dirty="0">
+              <a:rPr lang="ru-RU" sz="2000" dirty="0">
                 <a:solidFill>
                   <a:schemeClr val="dk1"/>
                 </a:solidFill>
               </a:rPr>
-              <a:t>Разработана нейросетевая модель с точностью ROC-AUC 0.83.</a:t>
+              <a:t>Проведен сравнительный анализ и обоснован выбор </a:t>
+            </a:r>
+            <a:r>
+              <a:rPr lang="ru-RU" sz="2000" dirty="0" err="1">
+                <a:solidFill>
+                  <a:schemeClr val="dk1"/>
+                </a:solidFill>
+              </a:rPr>
+              <a:t>полносвязной</a:t>
+            </a:r>
+            <a:r>
+              <a:rPr lang="ru-RU" sz="2000" dirty="0">
+                <a:solidFill>
+                  <a:schemeClr val="dk1"/>
+                </a:solidFill>
+              </a:rPr>
+              <a:t> нейронной сети в связке с методами интерпретируемости для работы с медицинскими данными.</a:t>
             </a:r>
           </a:p>
           <a:p>
@@ -7760,28 +7792,12 @@
               <a:buChar char="●"/>
             </a:pPr>
             <a:r>
-              <a:rPr lang="ru-RU" sz="2400" dirty="0">
+              <a:rPr lang="ru-RU" sz="2000" dirty="0">
                 <a:solidFill>
                   <a:schemeClr val="dk1"/>
                 </a:solidFill>
               </a:rPr>
-              <a:t>Реализована оптимизация порога, повысившая </a:t>
-            </a:r>
-            <a:r>
-              <a:rPr lang="ru-RU" sz="2400" dirty="0" err="1">
-                <a:solidFill>
-                  <a:schemeClr val="dk1"/>
-                </a:solidFill>
-              </a:rPr>
-              <a:t>Recall</a:t>
-            </a:r>
-            <a:r>
-              <a:rPr lang="ru-RU" sz="2400" dirty="0">
-                <a:solidFill>
-                  <a:schemeClr val="dk1"/>
-                </a:solidFill>
-              </a:rPr>
-              <a:t> до 84%.</a:t>
+              <a:t>Спроектирована четырехслойная архитектура глубокой нейронной сети </a:t>
             </a:r>
           </a:p>
           <a:p>
@@ -7799,12 +7815,28 @@
               <a:buChar char="●"/>
             </a:pPr>
             <a:r>
-              <a:rPr lang="ru-RU" sz="2400" dirty="0">
+              <a:rPr lang="ru-RU" sz="2000" dirty="0">
                 <a:solidFill>
                   <a:schemeClr val="dk1"/>
                 </a:solidFill>
               </a:rPr>
-              <a:t>Обеспечена интерпретируемость результатов через алгоритм SHAP.</a:t>
+              <a:t>Реализован модуль автоматического подбора </a:t>
+            </a:r>
+            <a:r>
+              <a:rPr lang="ru-RU" sz="2000" dirty="0" err="1">
+                <a:solidFill>
+                  <a:schemeClr val="dk1"/>
+                </a:solidFill>
+              </a:rPr>
+              <a:t>гиперпараметров</a:t>
+            </a:r>
+            <a:r>
+              <a:rPr lang="ru-RU" sz="2000" dirty="0">
+                <a:solidFill>
+                  <a:schemeClr val="dk1"/>
+                </a:solidFill>
+              </a:rPr>
+              <a:t>, обеспечивший достижение показателя ROC-AUC на уровне 0.83</a:t>
             </a:r>
           </a:p>
           <a:p>
@@ -7822,14 +7854,37 @@
               <a:buChar char="●"/>
             </a:pPr>
             <a:r>
-              <a:rPr lang="ru-RU" sz="2400" dirty="0">
+              <a:rPr lang="ru-RU" sz="2000" dirty="0">
                 <a:solidFill>
                   <a:schemeClr val="dk1"/>
                 </a:solidFill>
               </a:rPr>
-              <a:t>Спроектирована отказоустойчивая архитектура для работы с табличными данными.</a:t>
+              <a:t>Разработан алгоритм калибровки порога классификации по метрике F2-score, что повысило полноту до 84%.</a:t>
             </a:r>
-            <a:endParaRPr dirty="0"/>
+          </a:p>
+          <a:p>
+            <a:pPr marL="457200" lvl="0" indent="-381000" algn="l" rtl="0">
+              <a:spcBef>
+                <a:spcPts val="0"/>
+              </a:spcBef>
+              <a:spcAft>
+                <a:spcPts val="0"/>
+              </a:spcAft>
+              <a:buClr>
+                <a:schemeClr val="dk1"/>
+              </a:buClr>
+              <a:buSzPts val="2400"/>
+              <a:buChar char="●"/>
+            </a:pPr>
+            <a:r>
+              <a:rPr lang="ru-RU" sz="2000" dirty="0">
+                <a:solidFill>
+                  <a:schemeClr val="dk1"/>
+                </a:solidFill>
+              </a:rPr>
+              <a:t>Интегрирован модуль SHAP с наглядной визуализацией вклада каждого симптома в итоговый риск.</a:t>
+            </a:r>
+            <a:endParaRPr sz="2000" dirty="0"/>
           </a:p>
         </p:txBody>
       </p:sp>
@@ -7872,6 +7927,45 @@
               <a:t>11</a:t>
             </a:fld>
             <a:endParaRPr/>
+          </a:p>
+        </p:txBody>
+      </p:sp>
+      <p:sp>
+        <p:nvSpPr>
+          <p:cNvPr id="4" name="TextBox 3">
+            <a:extLst>
+              <a:ext uri="{FF2B5EF4-FFF2-40B4-BE49-F238E27FC236}">
+                <a16:creationId xmlns:a16="http://schemas.microsoft.com/office/drawing/2014/main" id="{447E33CE-3F33-9585-3DE3-F96202815CE7}"/>
+              </a:ext>
+            </a:extLst>
+          </p:cNvPr>
+          <p:cNvSpPr txBox="1"/>
+          <p:nvPr/>
+        </p:nvSpPr>
+        <p:spPr>
+          <a:xfrm>
+            <a:off x="694353" y="4895780"/>
+            <a:ext cx="7864891" cy="1323439"/>
+          </a:xfrm>
+          <a:prstGeom prst="rect">
+            <a:avLst/>
+          </a:prstGeom>
+          <a:noFill/>
+        </p:spPr>
+        <p:txBody>
+          <a:bodyPr wrap="square">
+            <a:spAutoFit/>
+          </a:bodyPr>
+          <a:lstStyle/>
+          <a:p>
+            <a:r>
+              <a:rPr lang="ru-RU" sz="2000" dirty="0">
+                <a:solidFill>
+                  <a:schemeClr val="dk1"/>
+                </a:solidFill>
+              </a:rPr>
+              <a:t>Направления дальнейших исследований: расширение спектра входных параметров, проведение на обезличенных данных локальных медицинских учреждений для проверки её стабильности вне рамок исходного датасета. </a:t>
+            </a:r>
           </a:p>
         </p:txBody>
       </p:sp>
@@ -8237,7 +8331,7 @@
                   <a:srgbClr val="000000"/>
                 </a:solidFill>
               </a:rPr>
-              <a:t>занимает слишком много времени,</a:t>
+              <a:t>занимает слишком много времени</a:t>
             </a:r>
             <a:endParaRPr sz="2400" dirty="0">
               <a:solidFill>
@@ -8266,14 +8360,6 @@
                 </a:solidFill>
               </a:rPr>
               <a:t>требует квалифицированных работников</a:t>
-            </a:r>
-            <a:r>
-              <a:rPr lang="en" sz="2400" dirty="0">
-                <a:solidFill>
-                  <a:srgbClr val="000000"/>
-                </a:solidFill>
-              </a:rPr>
-              <a:t>.</a:t>
             </a:r>
             <a:endParaRPr sz="2400" dirty="0">
               <a:solidFill>
@@ -9870,6 +9956,46 @@
           </a:p>
         </p:txBody>
       </p:sp>
+      <p:sp>
+        <p:nvSpPr>
+          <p:cNvPr id="2" name="TextBox 1">
+            <a:extLst>
+              <a:ext uri="{FF2B5EF4-FFF2-40B4-BE49-F238E27FC236}">
+                <a16:creationId xmlns:a16="http://schemas.microsoft.com/office/drawing/2014/main" id="{E820F6DE-1BC5-986E-39AF-1F61D7438D02}"/>
+              </a:ext>
+            </a:extLst>
+          </p:cNvPr>
+          <p:cNvSpPr txBox="1"/>
+          <p:nvPr/>
+        </p:nvSpPr>
+        <p:spPr>
+          <a:xfrm>
+            <a:off x="4824588" y="6326083"/>
+            <a:ext cx="2202847" cy="307777"/>
+          </a:xfrm>
+          <a:prstGeom prst="rect">
+            <a:avLst/>
+          </a:prstGeom>
+          <a:noFill/>
+        </p:spPr>
+        <p:txBody>
+          <a:bodyPr wrap="none" rtlCol="0">
+            <a:spAutoFit/>
+          </a:bodyPr>
+          <a:lstStyle/>
+          <a:p>
+            <a:r>
+              <a:rPr lang="ru-RU" dirty="0"/>
+              <a:t>Рисунок 1. Пример </a:t>
+            </a:r>
+            <a:r>
+              <a:rPr lang="en-US" dirty="0"/>
+              <a:t>DNN</a:t>
+            </a:r>
+            <a:endParaRPr lang="ru-RU" dirty="0"/>
+          </a:p>
+        </p:txBody>
+      </p:sp>
     </p:spTree>
   </p:cSld>
   <p:clrMapOvr>
@@ -10195,8 +10321,8 @@
         </p:nvSpPr>
         <p:spPr>
           <a:xfrm>
-            <a:off x="311700" y="1536633"/>
-            <a:ext cx="8520600" cy="4555200"/>
+            <a:off x="311700" y="1365612"/>
+            <a:ext cx="8520600" cy="933640"/>
           </a:xfrm>
           <a:prstGeom prst="rect">
             <a:avLst/>
@@ -10223,7 +10349,7 @@
                   <a:srgbClr val="000000"/>
                 </a:solidFill>
               </a:rPr>
-              <a:t>Обучение проводилось до 100 эпох с ранней остановкой </a:t>
+              <a:t>Обучение проводилось до 100 эпох с ранней остановкой, на рисунке 2 представлены полученные метрики </a:t>
             </a:r>
           </a:p>
         </p:txBody>
@@ -10292,7 +10418,7 @@
         </p:blipFill>
         <p:spPr>
           <a:xfrm>
-            <a:off x="188113" y="2652562"/>
+            <a:off x="253385" y="2807666"/>
             <a:ext cx="8767773" cy="3502165"/>
           </a:xfrm>
           <a:prstGeom prst="rect">
@@ -10300,6 +10426,41 @@
           </a:prstGeom>
         </p:spPr>
       </p:pic>
+      <p:sp>
+        <p:nvSpPr>
+          <p:cNvPr id="4" name="TextBox 3">
+            <a:extLst>
+              <a:ext uri="{FF2B5EF4-FFF2-40B4-BE49-F238E27FC236}">
+                <a16:creationId xmlns:a16="http://schemas.microsoft.com/office/drawing/2014/main" id="{6C704229-F007-F22C-2CC4-9108F3B3A92A}"/>
+              </a:ext>
+            </a:extLst>
+          </p:cNvPr>
+          <p:cNvSpPr txBox="1"/>
+          <p:nvPr/>
+        </p:nvSpPr>
+        <p:spPr>
+          <a:xfrm>
+            <a:off x="3300658" y="5956856"/>
+            <a:ext cx="2542684" cy="307777"/>
+          </a:xfrm>
+          <a:prstGeom prst="rect">
+            <a:avLst/>
+          </a:prstGeom>
+          <a:noFill/>
+        </p:spPr>
+        <p:txBody>
+          <a:bodyPr wrap="none" rtlCol="0">
+            <a:spAutoFit/>
+          </a:bodyPr>
+          <a:lstStyle/>
+          <a:p>
+            <a:r>
+              <a:rPr lang="ru-RU" dirty="0"/>
+              <a:t>Рисунок 2. Значения метрик</a:t>
+            </a:r>
+          </a:p>
+        </p:txBody>
+      </p:sp>
     </p:spTree>
     <p:extLst>
       <p:ext uri="{BB962C8B-B14F-4D97-AF65-F5344CB8AC3E}">
@@ -10734,6 +10895,49 @@
           </a:prstGeom>
         </p:spPr>
       </p:pic>
+      <p:sp>
+        <p:nvSpPr>
+          <p:cNvPr id="2" name="TextBox 1">
+            <a:extLst>
+              <a:ext uri="{FF2B5EF4-FFF2-40B4-BE49-F238E27FC236}">
+                <a16:creationId xmlns:a16="http://schemas.microsoft.com/office/drawing/2014/main" id="{8F66B5A6-58D1-AFAD-42B9-8E1DD75F17DB}"/>
+              </a:ext>
+            </a:extLst>
+          </p:cNvPr>
+          <p:cNvSpPr txBox="1"/>
+          <p:nvPr/>
+        </p:nvSpPr>
+        <p:spPr>
+          <a:xfrm>
+            <a:off x="2415472" y="4530431"/>
+            <a:ext cx="2345514" cy="307777"/>
+          </a:xfrm>
+          <a:prstGeom prst="rect">
+            <a:avLst/>
+          </a:prstGeom>
+          <a:noFill/>
+        </p:spPr>
+        <p:txBody>
+          <a:bodyPr wrap="none" rtlCol="0">
+            <a:spAutoFit/>
+          </a:bodyPr>
+          <a:lstStyle/>
+          <a:p>
+            <a:r>
+              <a:rPr lang="ru-RU" dirty="0"/>
+              <a:t>Рисунок </a:t>
+            </a:r>
+            <a:r>
+              <a:rPr lang="en-US" dirty="0"/>
+              <a:t>3</a:t>
+            </a:r>
+            <a:r>
+              <a:rPr lang="ru-RU" dirty="0"/>
+              <a:t>. График порога</a:t>
+            </a:r>
+          </a:p>
+        </p:txBody>
+      </p:sp>
     </p:spTree>
   </p:cSld>
   <p:clrMapOvr>
@@ -11005,6 +11209,50 @@
               <a:t>9</a:t>
             </a:fld>
             <a:endParaRPr/>
+          </a:p>
+        </p:txBody>
+      </p:sp>
+      <p:sp>
+        <p:nvSpPr>
+          <p:cNvPr id="2" name="TextBox 1">
+            <a:extLst>
+              <a:ext uri="{FF2B5EF4-FFF2-40B4-BE49-F238E27FC236}">
+                <a16:creationId xmlns:a16="http://schemas.microsoft.com/office/drawing/2014/main" id="{1C7D16A5-E042-6E46-72CB-D2605D373827}"/>
+              </a:ext>
+            </a:extLst>
+          </p:cNvPr>
+          <p:cNvSpPr txBox="1"/>
+          <p:nvPr/>
+        </p:nvSpPr>
+        <p:spPr>
+          <a:xfrm>
+            <a:off x="2876519" y="6523835"/>
+            <a:ext cx="2449710" cy="307777"/>
+          </a:xfrm>
+          <a:prstGeom prst="rect">
+            <a:avLst/>
+          </a:prstGeom>
+          <a:noFill/>
+        </p:spPr>
+        <p:txBody>
+          <a:bodyPr wrap="none" rtlCol="0">
+            <a:spAutoFit/>
+          </a:bodyPr>
+          <a:lstStyle/>
+          <a:p>
+            <a:r>
+              <a:rPr lang="ru-RU"/>
+              <a:t>Рисунок 4. </a:t>
+            </a:r>
+            <a:r>
+              <a:rPr lang="ru-RU" dirty="0"/>
+              <a:t>Значения </a:t>
+            </a:r>
+            <a:r>
+              <a:rPr lang="en-US" dirty="0"/>
+              <a:t>SHAP</a:t>
+            </a:r>
+            <a:endParaRPr lang="ru-RU" dirty="0"/>
           </a:p>
         </p:txBody>
       </p:sp>
